--- a/Yaya-Roadshow-2026.pptx
+++ b/Yaya-Roadshow-2026.pptx
@@ -7440,7 +7440,7 @@
         </p:nvSpPr>
         <p:spPr>
           <a:xfrm>
-            <a:off x="548640" y="3474720"/>
+            <a:off x="548640" y="3337560"/>
             <a:ext cx="7315200" cy="365760"/>
           </a:xfrm>
           <a:prstGeom prst="rect">
@@ -7479,8 +7479,8 @@
         </p:nvSpPr>
         <p:spPr>
           <a:xfrm>
-            <a:off x="411480" y="3840480"/>
-            <a:ext cx="8321040" cy="1005840"/>
+            <a:off x="411480" y="3931920"/>
+            <a:ext cx="8321040" cy="914400"/>
           </a:xfrm>
           <a:prstGeom prst="rect">
             <a:avLst/>
@@ -7727,7 +7727,7 @@
         </p:nvSpPr>
         <p:spPr>
           <a:xfrm>
-            <a:off x="457200" y="2560320"/>
+            <a:off x="457200" y="2743200"/>
             <a:ext cx="8229600" cy="548640"/>
           </a:xfrm>
           <a:prstGeom prst="rect">
